--- a/tests/fixtures/one-button.pptx
+++ b/tests/fixtures/one-button.pptx
@@ -1034,20 +1034,13 @@
               <a:buNone/>
             </a:pPr>
             <a:r>
-              <a:rPr lang="en-US" sz="2000" b="1" u="sng" dirty="0">
+              <a:rPr lang="en-US" sz="2000" b="1" dirty="0">
                 <a:solidFill>
                   <a:srgbClr val="FFFFFF"/>
                 </a:solidFill>
                 <a:latin typeface="Helvetica Neue" pitchFamily="34" charset="0"/>
                 <a:ea typeface="Helvetica Neue" pitchFamily="34" charset="-122"/>
                 <a:cs typeface="Helvetica Neue" pitchFamily="34" charset="-120"/>
-                <a:hlinkClick r:id="rId1" action="ppaction://hlinksldjump" tooltip="">
-                  <a:extLst>
-                    <a:ext uri="{A12FA001-AC4F-418D-AE19-62706E023703}">
-                      <ahyp:hlinkClr xmlns:ahyp="http://schemas.microsoft.com/office/drawing/2018/hyperlinkcolor" val="tx"/>
-                    </a:ext>
-                  </a:extLst>
-                </a:hlinkClick>
               </a:rPr>
               <a:t>Sustainability</a:t>
             </a:r>
@@ -1157,20 +1150,13 @@
               <a:buNone/>
             </a:pPr>
             <a:r>
-              <a:rPr lang="en-US" sz="1400" b="1" u="sng" dirty="0">
+              <a:rPr lang="en-US" sz="1400" b="1" dirty="0">
                 <a:solidFill>
                   <a:srgbClr val="FFFFFF"/>
                 </a:solidFill>
                 <a:latin typeface="Helvetica Neue" pitchFamily="34" charset="0"/>
                 <a:ea typeface="Helvetica Neue" pitchFamily="34" charset="-122"/>
                 <a:cs typeface="Helvetica Neue" pitchFamily="34" charset="-120"/>
-                <a:hlinkClick r:id="rId1" action="ppaction://hlinksldjump" tooltip="">
-                  <a:extLst>
-                    <a:ext uri="{A12FA001-AC4F-418D-AE19-62706E023703}">
-                      <ahyp:hlinkClr xmlns:ahyp="http://schemas.microsoft.com/office/drawing/2018/hyperlinkcolor" val="tx"/>
-                    </a:ext>
-                  </a:extLst>
-                </a:hlinkClick>
               </a:rPr>
               <a:t>Home</a:t>
             </a:r>
